--- a/templates/static/chart/pie_chart_blue_technology.pptx
+++ b/templates/static/chart/pie_chart_blue_technology.pptx
@@ -3123,11 +3123,851 @@
           </a:p>
         </p:txBody>
       </p:sp>
+      <p:sp>
+        <p:nvSpPr>
+          <p:cNvPr id="1006" name="TextBox 1005"/>
+          <p:cNvSpPr txBox="1"/>
+          <p:nvPr/>
+        </p:nvSpPr>
+        <p:spPr>
+          <a:xfrm>
+            <a:off x="4302433" y="3207745"/>
+            <a:ext cx="640080" cy="219456"/>
+          </a:xfrm>
+          <a:prstGeom prst="rect">
+            <a:avLst/>
+          </a:prstGeom>
+          <a:noFill/>
+        </p:spPr>
+        <p:txBody>
+          <a:bodyPr wrap="square">
+            <a:spAutoFit/>
+          </a:bodyPr>
+          <a:lstStyle/>
+          <a:p>
+            <a:pPr algn="ctr">
+              <a:defRPr sz="1000" b="1">
+                <a:solidFill>
+                  <a:srgbClr val="FFFFFF"/>
+                </a:solidFill>
+              </a:defRPr>
+            </a:pPr>
+            <a:r>
+              <a:t>38.0%</a:t>
+            </a:r>
+          </a:p>
+        </p:txBody>
+      </p:sp>
+      <p:sp>
+        <p:nvSpPr>
+          <p:cNvPr id="1007" name="TextBox 1006"/>
+          <p:cNvSpPr txBox="1"/>
+          <p:nvPr/>
+        </p:nvSpPr>
+        <p:spPr>
+          <a:xfrm>
+            <a:off x="3154680" y="4896612"/>
+            <a:ext cx="640080" cy="219456"/>
+          </a:xfrm>
+          <a:prstGeom prst="rect">
+            <a:avLst/>
+          </a:prstGeom>
+          <a:noFill/>
+        </p:spPr>
+        <p:txBody>
+          <a:bodyPr wrap="square">
+            <a:spAutoFit/>
+          </a:bodyPr>
+          <a:lstStyle/>
+          <a:p>
+            <a:pPr algn="ctr">
+              <a:defRPr sz="1000" b="1">
+                <a:solidFill>
+                  <a:srgbClr val="FFFFFF"/>
+                </a:solidFill>
+              </a:defRPr>
+            </a:pPr>
+            <a:r>
+              <a:t>24.0%</a:t>
+            </a:r>
+          </a:p>
+        </p:txBody>
+      </p:sp>
+      <p:sp>
+        <p:nvSpPr>
+          <p:cNvPr id="1008" name="TextBox 1007"/>
+          <p:cNvSpPr txBox="1"/>
+          <p:nvPr/>
+        </p:nvSpPr>
+        <p:spPr>
+          <a:xfrm>
+            <a:off x="1949970" y="3931456"/>
+            <a:ext cx="640080" cy="219456"/>
+          </a:xfrm>
+          <a:prstGeom prst="rect">
+            <a:avLst/>
+          </a:prstGeom>
+          <a:noFill/>
+        </p:spPr>
+        <p:txBody>
+          <a:bodyPr wrap="square">
+            <a:spAutoFit/>
+          </a:bodyPr>
+          <a:lstStyle/>
+          <a:p>
+            <a:pPr algn="ctr">
+              <a:defRPr sz="1000" b="1">
+                <a:solidFill>
+                  <a:srgbClr val="FFFFFF"/>
+                </a:solidFill>
+              </a:defRPr>
+            </a:pPr>
+            <a:r>
+              <a:t>19.0%</a:t>
+            </a:r>
+          </a:p>
+        </p:txBody>
+      </p:sp>
+      <p:sp>
+        <p:nvSpPr>
+          <p:cNvPr id="1009" name="TextBox 1008"/>
+          <p:cNvSpPr txBox="1"/>
+          <p:nvPr/>
+        </p:nvSpPr>
+        <p:spPr>
+          <a:xfrm>
+            <a:off x="2228713" y="2845823"/>
+            <a:ext cx="640080" cy="219456"/>
+          </a:xfrm>
+          <a:prstGeom prst="rect">
+            <a:avLst/>
+          </a:prstGeom>
+          <a:noFill/>
+        </p:spPr>
+        <p:txBody>
+          <a:bodyPr wrap="square">
+            <a:spAutoFit/>
+          </a:bodyPr>
+          <a:lstStyle/>
+          <a:p>
+            <a:pPr algn="ctr">
+              <a:defRPr sz="1000" b="1">
+                <a:solidFill>
+                  <a:srgbClr val="FFFFFF"/>
+                </a:solidFill>
+              </a:defRPr>
+            </a:pPr>
+            <a:r>
+              <a:t>11.0%</a:t>
+            </a:r>
+          </a:p>
+        </p:txBody>
+      </p:sp>
+      <p:sp>
+        <p:nvSpPr>
+          <p:cNvPr id="1010" name="TextBox 1009"/>
+          <p:cNvSpPr txBox="1"/>
+          <p:nvPr/>
+        </p:nvSpPr>
+        <p:spPr>
+          <a:xfrm>
+            <a:off x="2847688" y="2466515"/>
+            <a:ext cx="640080" cy="219456"/>
+          </a:xfrm>
+          <a:prstGeom prst="rect">
+            <a:avLst/>
+          </a:prstGeom>
+          <a:noFill/>
+        </p:spPr>
+        <p:txBody>
+          <a:bodyPr wrap="square">
+            <a:spAutoFit/>
+          </a:bodyPr>
+          <a:lstStyle/>
+          <a:p>
+            <a:pPr algn="ctr">
+              <a:defRPr sz="1000" b="1">
+                <a:solidFill>
+                  <a:srgbClr val="FFFFFF"/>
+                </a:solidFill>
+              </a:defRPr>
+            </a:pPr>
+            <a:r>
+              <a:t>8.0%</a:t>
+            </a:r>
+          </a:p>
+        </p:txBody>
+      </p:sp>
+      <p:sp>
+        <p:nvSpPr>
+          <p:cNvPr id="1011" name="Rounded Rectangle 1010"/>
+          <p:cNvSpPr/>
+          <p:nvPr/>
+        </p:nvSpPr>
+        <p:spPr>
+          <a:xfrm>
+            <a:off x="6583680" y="1714500"/>
+            <a:ext cx="228600" cy="228600"/>
+          </a:xfrm>
+          <a:prstGeom prst="roundRect">
+            <a:avLst/>
+          </a:prstGeom>
+          <a:solidFill>
+            <a:srgbClr val="3498DB"/>
+          </a:solidFill>
+          <a:ln>
+            <a:noFill/>
+          </a:ln>
+        </p:spPr>
+        <p:style>
+          <a:lnRef idx="1">
+            <a:schemeClr val="accent1"/>
+          </a:lnRef>
+          <a:fillRef idx="3">
+            <a:schemeClr val="accent1"/>
+          </a:fillRef>
+          <a:effectRef idx="2">
+            <a:schemeClr val="accent1"/>
+          </a:effectRef>
+          <a:fontRef idx="minor">
+            <a:schemeClr val="lt1"/>
+          </a:fontRef>
+        </p:style>
+        <p:txBody>
+          <a:bodyPr rtlCol="0" anchor="ctr"/>
+          <a:lstStyle/>
+          <a:p>
+            <a:pPr algn="ctr"/>
+          </a:p>
+        </p:txBody>
+      </p:sp>
+      <p:sp>
+        <p:nvSpPr>
+          <p:cNvPr id="1012" name="TextBox 1011"/>
+          <p:cNvSpPr txBox="1"/>
+          <p:nvPr/>
+        </p:nvSpPr>
+        <p:spPr>
+          <a:xfrm>
+            <a:off x="6903720" y="1696212"/>
+            <a:ext cx="1828800" cy="274320"/>
+          </a:xfrm>
+          <a:prstGeom prst="rect">
+            <a:avLst/>
+          </a:prstGeom>
+          <a:noFill/>
+        </p:spPr>
+        <p:txBody>
+          <a:bodyPr wrap="square">
+            <a:spAutoFit/>
+          </a:bodyPr>
+          <a:lstStyle/>
+          <a:p>
+            <a:pPr algn="l">
+              <a:defRPr sz="1100" b="0">
+                <a:solidFill>
+                  <a:srgbClr val="555555"/>
+                </a:solidFill>
+              </a:defRPr>
+            </a:pPr>
+            <a:r>
+              <a:t>华东  38.0%</a:t>
+            </a:r>
+          </a:p>
+        </p:txBody>
+      </p:sp>
+      <p:sp>
+        <p:nvSpPr>
+          <p:cNvPr id="1013" name="Rounded Rectangle 1012"/>
+          <p:cNvSpPr/>
+          <p:nvPr/>
+        </p:nvSpPr>
+        <p:spPr>
+          <a:xfrm>
+            <a:off x="6583680" y="2080260"/>
+            <a:ext cx="228600" cy="228600"/>
+          </a:xfrm>
+          <a:prstGeom prst="roundRect">
+            <a:avLst/>
+          </a:prstGeom>
+          <a:solidFill>
+            <a:srgbClr val="E74C3C"/>
+          </a:solidFill>
+          <a:ln>
+            <a:noFill/>
+          </a:ln>
+        </p:spPr>
+        <p:style>
+          <a:lnRef idx="1">
+            <a:schemeClr val="accent1"/>
+          </a:lnRef>
+          <a:fillRef idx="3">
+            <a:schemeClr val="accent1"/>
+          </a:fillRef>
+          <a:effectRef idx="2">
+            <a:schemeClr val="accent1"/>
+          </a:effectRef>
+          <a:fontRef idx="minor">
+            <a:schemeClr val="lt1"/>
+          </a:fontRef>
+        </p:style>
+        <p:txBody>
+          <a:bodyPr rtlCol="0" anchor="ctr"/>
+          <a:lstStyle/>
+          <a:p>
+            <a:pPr algn="ctr"/>
+          </a:p>
+        </p:txBody>
+      </p:sp>
+      <p:sp>
+        <p:nvSpPr>
+          <p:cNvPr id="1014" name="TextBox 1013"/>
+          <p:cNvSpPr txBox="1"/>
+          <p:nvPr/>
+        </p:nvSpPr>
+        <p:spPr>
+          <a:xfrm>
+            <a:off x="6903720" y="2061972"/>
+            <a:ext cx="1828800" cy="274320"/>
+          </a:xfrm>
+          <a:prstGeom prst="rect">
+            <a:avLst/>
+          </a:prstGeom>
+          <a:noFill/>
+        </p:spPr>
+        <p:txBody>
+          <a:bodyPr wrap="square">
+            <a:spAutoFit/>
+          </a:bodyPr>
+          <a:lstStyle/>
+          <a:p>
+            <a:pPr algn="l">
+              <a:defRPr sz="1100" b="0">
+                <a:solidFill>
+                  <a:srgbClr val="555555"/>
+                </a:solidFill>
+              </a:defRPr>
+            </a:pPr>
+            <a:r>
+              <a:t>华南  24.0%</a:t>
+            </a:r>
+          </a:p>
+        </p:txBody>
+      </p:sp>
+      <p:sp>
+        <p:nvSpPr>
+          <p:cNvPr id="1015" name="Rounded Rectangle 1014"/>
+          <p:cNvSpPr/>
+          <p:nvPr/>
+        </p:nvSpPr>
+        <p:spPr>
+          <a:xfrm>
+            <a:off x="6583680" y="2446020"/>
+            <a:ext cx="228600" cy="228600"/>
+          </a:xfrm>
+          <a:prstGeom prst="roundRect">
+            <a:avLst/>
+          </a:prstGeom>
+          <a:solidFill>
+            <a:srgbClr val="2ECC71"/>
+          </a:solidFill>
+          <a:ln>
+            <a:noFill/>
+          </a:ln>
+        </p:spPr>
+        <p:style>
+          <a:lnRef idx="1">
+            <a:schemeClr val="accent1"/>
+          </a:lnRef>
+          <a:fillRef idx="3">
+            <a:schemeClr val="accent1"/>
+          </a:fillRef>
+          <a:effectRef idx="2">
+            <a:schemeClr val="accent1"/>
+          </a:effectRef>
+          <a:fontRef idx="minor">
+            <a:schemeClr val="lt1"/>
+          </a:fontRef>
+        </p:style>
+        <p:txBody>
+          <a:bodyPr rtlCol="0" anchor="ctr"/>
+          <a:lstStyle/>
+          <a:p>
+            <a:pPr algn="ctr"/>
+          </a:p>
+        </p:txBody>
+      </p:sp>
+      <p:sp>
+        <p:nvSpPr>
+          <p:cNvPr id="1016" name="TextBox 1015"/>
+          <p:cNvSpPr txBox="1"/>
+          <p:nvPr/>
+        </p:nvSpPr>
+        <p:spPr>
+          <a:xfrm>
+            <a:off x="6903720" y="2427732"/>
+            <a:ext cx="1828800" cy="274320"/>
+          </a:xfrm>
+          <a:prstGeom prst="rect">
+            <a:avLst/>
+          </a:prstGeom>
+          <a:noFill/>
+        </p:spPr>
+        <p:txBody>
+          <a:bodyPr wrap="square">
+            <a:spAutoFit/>
+          </a:bodyPr>
+          <a:lstStyle/>
+          <a:p>
+            <a:pPr algn="l">
+              <a:defRPr sz="1100" b="0">
+                <a:solidFill>
+                  <a:srgbClr val="555555"/>
+                </a:solidFill>
+              </a:defRPr>
+            </a:pPr>
+            <a:r>
+              <a:t>华北  19.0%</a:t>
+            </a:r>
+          </a:p>
+        </p:txBody>
+      </p:sp>
+      <p:sp>
+        <p:nvSpPr>
+          <p:cNvPr id="1017" name="Rounded Rectangle 1016"/>
+          <p:cNvSpPr/>
+          <p:nvPr/>
+        </p:nvSpPr>
+        <p:spPr>
+          <a:xfrm>
+            <a:off x="6583680" y="2811780"/>
+            <a:ext cx="228600" cy="228600"/>
+          </a:xfrm>
+          <a:prstGeom prst="roundRect">
+            <a:avLst/>
+          </a:prstGeom>
+          <a:solidFill>
+            <a:srgbClr val="9B59B6"/>
+          </a:solidFill>
+          <a:ln>
+            <a:noFill/>
+          </a:ln>
+        </p:spPr>
+        <p:style>
+          <a:lnRef idx="1">
+            <a:schemeClr val="accent1"/>
+          </a:lnRef>
+          <a:fillRef idx="3">
+            <a:schemeClr val="accent1"/>
+          </a:fillRef>
+          <a:effectRef idx="2">
+            <a:schemeClr val="accent1"/>
+          </a:effectRef>
+          <a:fontRef idx="minor">
+            <a:schemeClr val="lt1"/>
+          </a:fontRef>
+        </p:style>
+        <p:txBody>
+          <a:bodyPr rtlCol="0" anchor="ctr"/>
+          <a:lstStyle/>
+          <a:p>
+            <a:pPr algn="ctr"/>
+          </a:p>
+        </p:txBody>
+      </p:sp>
+      <p:sp>
+        <p:nvSpPr>
+          <p:cNvPr id="1018" name="TextBox 1017"/>
+          <p:cNvSpPr txBox="1"/>
+          <p:nvPr/>
+        </p:nvSpPr>
+        <p:spPr>
+          <a:xfrm>
+            <a:off x="6903720" y="2793492"/>
+            <a:ext cx="1828800" cy="274320"/>
+          </a:xfrm>
+          <a:prstGeom prst="rect">
+            <a:avLst/>
+          </a:prstGeom>
+          <a:noFill/>
+        </p:spPr>
+        <p:txBody>
+          <a:bodyPr wrap="square">
+            <a:spAutoFit/>
+          </a:bodyPr>
+          <a:lstStyle/>
+          <a:p>
+            <a:pPr algn="l">
+              <a:defRPr sz="1100" b="0">
+                <a:solidFill>
+                  <a:srgbClr val="555555"/>
+                </a:solidFill>
+              </a:defRPr>
+            </a:pPr>
+            <a:r>
+              <a:t>西南  11.0%</a:t>
+            </a:r>
+          </a:p>
+        </p:txBody>
+      </p:sp>
+      <p:sp>
+        <p:nvSpPr>
+          <p:cNvPr id="1019" name="Rounded Rectangle 1018"/>
+          <p:cNvSpPr/>
+          <p:nvPr/>
+        </p:nvSpPr>
+        <p:spPr>
+          <a:xfrm>
+            <a:off x="6583680" y="3177540"/>
+            <a:ext cx="228600" cy="228600"/>
+          </a:xfrm>
+          <a:prstGeom prst="roundRect">
+            <a:avLst/>
+          </a:prstGeom>
+          <a:solidFill>
+            <a:srgbClr val="F1C40F"/>
+          </a:solidFill>
+          <a:ln>
+            <a:noFill/>
+          </a:ln>
+        </p:spPr>
+        <p:style>
+          <a:lnRef idx="1">
+            <a:schemeClr val="accent1"/>
+          </a:lnRef>
+          <a:fillRef idx="3">
+            <a:schemeClr val="accent1"/>
+          </a:fillRef>
+          <a:effectRef idx="2">
+            <a:schemeClr val="accent1"/>
+          </a:effectRef>
+          <a:fontRef idx="minor">
+            <a:schemeClr val="lt1"/>
+          </a:fontRef>
+        </p:style>
+        <p:txBody>
+          <a:bodyPr rtlCol="0" anchor="ctr"/>
+          <a:lstStyle/>
+          <a:p>
+            <a:pPr algn="ctr"/>
+          </a:p>
+        </p:txBody>
+      </p:sp>
+      <p:sp>
+        <p:nvSpPr>
+          <p:cNvPr id="1020" name="TextBox 1019"/>
+          <p:cNvSpPr txBox="1"/>
+          <p:nvPr/>
+        </p:nvSpPr>
+        <p:spPr>
+          <a:xfrm>
+            <a:off x="6903720" y="3159252"/>
+            <a:ext cx="1828800" cy="274320"/>
+          </a:xfrm>
+          <a:prstGeom prst="rect">
+            <a:avLst/>
+          </a:prstGeom>
+          <a:noFill/>
+        </p:spPr>
+        <p:txBody>
+          <a:bodyPr wrap="square">
+            <a:spAutoFit/>
+          </a:bodyPr>
+          <a:lstStyle/>
+          <a:p>
+            <a:pPr algn="l">
+              <a:defRPr sz="1100" b="0">
+                <a:solidFill>
+                  <a:srgbClr val="555555"/>
+                </a:solidFill>
+              </a:defRPr>
+            </a:pPr>
+            <a:r>
+              <a:t>其他  8.0%</a:t>
+            </a:r>
+          </a:p>
+        </p:txBody>
+      </p:sp>
+      <p:sp>
+        <p:nvSpPr>
+          <p:cNvPr id="1021" name="TextBox 1020"/>
+          <p:cNvSpPr txBox="1"/>
+          <p:nvPr/>
+        </p:nvSpPr>
+        <p:spPr>
+          <a:xfrm>
+            <a:off x="3017520" y="3589020"/>
+            <a:ext cx="914400" cy="320040"/>
+          </a:xfrm>
+          <a:prstGeom prst="rect">
+            <a:avLst/>
+          </a:prstGeom>
+          <a:noFill/>
+        </p:spPr>
+        <p:txBody>
+          <a:bodyPr wrap="square">
+            <a:spAutoFit/>
+          </a:bodyPr>
+          <a:lstStyle/>
+          <a:p>
+            <a:pPr algn="ctr">
+              <a:defRPr sz="1800" b="1">
+                <a:solidFill>
+                  <a:srgbClr val="2C3E50"/>
+                </a:solidFill>
+              </a:defRPr>
+            </a:pPr>
+            <a:r>
+              <a:t>100</a:t>
+            </a:r>
+          </a:p>
+        </p:txBody>
+      </p:sp>
     </p:spTree>
   </p:cSld>
   <p:clrMapOvr>
     <a:masterClrMapping/>
   </p:clrMapOvr>
+  <p:sp>
+    <p:nvSpPr>
+      <p:cNvPr id="1001" name="Slice"/>
+      <p:cNvSpPr/>
+      <p:nvPr/>
+    </p:nvSpPr>
+    <p:spPr>
+      <a:xfrm>
+        <a:off x="0" y="0"/>
+        <a:ext cx="0" cy="0"/>
+      </a:xfrm>
+      <a:custGeom>
+        <a:avLst/>
+        <a:gdLst/>
+        <a:ahLst/>
+        <a:cxnLst/>
+        <a:rect l="0" t="0" r="0" b="0"/>
+        <a:pathLst>
+          <a:path w="4114800" h="4114800">
+            <a:moveTo>
+              <a:pt x="3474720" y="3771900"/>
+            </a:moveTo>
+            <a:lnTo>
+              <a:pt x="3474720" y="1714500"/>
+            </a:lnTo>
+            <a:arcTo wR="2057400" hR="2057400" stAng="0" swAng="8207999"/>
+            <a:close/>
+          </a:path>
+        </a:pathLst>
+      </a:custGeom>
+      <a:solidFill>
+        <a:srgbClr val="3498DB"/>
+      </a:solidFill>
+      <a:ln>
+        <a:solidFill>
+          <a:srgbClr val="FFFFFF"/>
+        </a:solidFill>
+        <a:width val="12700"/>
+      </a:ln>
+    </p:spPr>
+    <p:txBody>
+      <a:bodyPr/>
+      <a:lstStyle/>
+      <a:p>
+        <a:endParaRPr lang="zh-CN"/>
+      </a:p>
+    </p:txBody>
+  </p:sp>
+  <p:sp>
+    <p:nvSpPr>
+      <p:cNvPr id="1002" name="Slice"/>
+      <p:cNvSpPr/>
+      <p:nvPr/>
+    </p:nvSpPr>
+    <p:spPr>
+      <a:xfrm>
+        <a:off x="0" y="0"/>
+        <a:ext cx="0" cy="0"/>
+      </a:xfrm>
+      <a:custGeom>
+        <a:avLst/>
+        <a:gdLst/>
+        <a:ahLst/>
+        <a:cxnLst/>
+        <a:rect l="0" t="0" r="0" b="0"/>
+        <a:pathLst>
+          <a:path w="4114800" h="4114800">
+            <a:moveTo>
+              <a:pt x="3474720" y="3771900"/>
+            </a:moveTo>
+            <a:lnTo>
+              <a:pt x="4883107" y="5271680"/>
+            </a:lnTo>
+            <a:arcTo wR="2057400" hR="2057400" stAng="0" swAng="5183999"/>
+            <a:close/>
+          </a:path>
+        </a:pathLst>
+      </a:custGeom>
+      <a:solidFill>
+        <a:srgbClr val="E74C3C"/>
+      </a:solidFill>
+      <a:ln>
+        <a:solidFill>
+          <a:srgbClr val="FFFFFF"/>
+        </a:solidFill>
+        <a:width val="12700"/>
+      </a:ln>
+    </p:spPr>
+    <p:txBody>
+      <a:bodyPr/>
+      <a:lstStyle/>
+      <a:p>
+        <a:endParaRPr lang="zh-CN"/>
+      </a:p>
+    </p:txBody>
+  </p:sp>
+  <p:sp>
+    <p:nvSpPr>
+      <p:cNvPr id="1003" name="Slice"/>
+      <p:cNvSpPr/>
+      <p:nvPr/>
+    </p:nvSpPr>
+    <p:spPr>
+      <a:xfrm>
+        <a:off x="0" y="0"/>
+        <a:ext cx="0" cy="0"/>
+      </a:xfrm>
+      <a:custGeom>
+        <a:avLst/>
+        <a:gdLst/>
+        <a:ahLst/>
+        <a:cxnLst/>
+        <a:rect l="0" t="0" r="0" b="0"/>
+        <a:pathLst>
+          <a:path w="4114800" h="4114800">
+            <a:moveTo>
+              <a:pt x="3474720" y="3771900"/>
+            </a:moveTo>
+            <a:lnTo>
+              <a:pt x="2066333" y="5271680"/>
+            </a:lnTo>
+            <a:arcTo wR="2057400" hR="2057400" stAng="0" swAng="4103999"/>
+            <a:close/>
+          </a:path>
+        </a:pathLst>
+      </a:custGeom>
+      <a:solidFill>
+        <a:srgbClr val="2ECC71"/>
+      </a:solidFill>
+      <a:ln>
+        <a:solidFill>
+          <a:srgbClr val="FFFFFF"/>
+        </a:solidFill>
+        <a:width val="12700"/>
+      </a:ln>
+    </p:spPr>
+    <p:txBody>
+      <a:bodyPr/>
+      <a:lstStyle/>
+      <a:p>
+        <a:endParaRPr lang="zh-CN"/>
+      </a:p>
+    </p:txBody>
+  </p:sp>
+  <p:sp>
+    <p:nvSpPr>
+      <p:cNvPr id="1004" name="Slice"/>
+      <p:cNvSpPr/>
+      <p:nvPr/>
+    </p:nvSpPr>
+    <p:spPr>
+      <a:xfrm>
+        <a:off x="0" y="0"/>
+        <a:ext cx="0" cy="0"/>
+      </a:xfrm>
+      <a:custGeom>
+        <a:avLst/>
+        <a:gdLst/>
+        <a:ahLst/>
+        <a:cxnLst/>
+        <a:rect l="0" t="0" r="0" b="0"/>
+        <a:pathLst>
+          <a:path w="4114800" h="4114800">
+            <a:moveTo>
+              <a:pt x="3474720" y="3771900"/>
+            </a:moveTo>
+            <a:lnTo>
+              <a:pt x="1561798" y="3014521"/>
+            </a:lnTo>
+            <a:arcTo wR="2057400" hR="2057400" stAng="0" swAng="2375999"/>
+            <a:close/>
+          </a:path>
+        </a:pathLst>
+      </a:custGeom>
+      <a:solidFill>
+        <a:srgbClr val="9B59B6"/>
+      </a:solidFill>
+      <a:ln>
+        <a:solidFill>
+          <a:srgbClr val="FFFFFF"/>
+        </a:solidFill>
+        <a:width val="12700"/>
+      </a:ln>
+    </p:spPr>
+    <p:txBody>
+      <a:bodyPr/>
+      <a:lstStyle/>
+      <a:p>
+        <a:endParaRPr lang="zh-CN"/>
+      </a:p>
+    </p:txBody>
+  </p:sp>
+  <p:sp>
+    <p:nvSpPr>
+      <p:cNvPr id="1005" name="Slice"/>
+      <p:cNvSpPr/>
+      <p:nvPr/>
+    </p:nvSpPr>
+    <p:spPr>
+      <a:xfrm>
+        <a:off x="0" y="0"/>
+        <a:ext cx="0" cy="0"/>
+      </a:xfrm>
+      <a:custGeom>
+        <a:avLst/>
+        <a:gdLst/>
+        <a:ahLst/>
+        <a:cxnLst/>
+        <a:rect l="0" t="0" r="0" b="0"/>
+        <a:pathLst>
+          <a:path w="4114800" h="4114800">
+            <a:moveTo>
+              <a:pt x="3474720" y="3771900"/>
+            </a:moveTo>
+            <a:lnTo>
+              <a:pt x="2483560" y="1968987"/>
+            </a:lnTo>
+            <a:arcTo wR="2057400" hR="2057400" stAng="0" swAng="1727999"/>
+            <a:close/>
+          </a:path>
+        </a:pathLst>
+      </a:custGeom>
+      <a:solidFill>
+        <a:srgbClr val="F1C40F"/>
+      </a:solidFill>
+      <a:ln>
+        <a:solidFill>
+          <a:srgbClr val="FFFFFF"/>
+        </a:solidFill>
+        <a:width val="12700"/>
+      </a:ln>
+    </p:spPr>
+    <p:txBody>
+      <a:bodyPr/>
+      <a:lstStyle/>
+      <a:p>
+        <a:endParaRPr lang="zh-CN"/>
+      </a:p>
+    </p:txBody>
+  </p:sp>
 </p:sld>
 </file>
 
